--- a/curriculum/M01/W11/L02/slides.pptx
+++ b/curriculum/M01/W11/L02/slides.pptx
@@ -6751,11 +6751,40 @@
                 <a:ea typeface="Malgun Gothic"/>
                 <a:cs typeface="Malgun Gothic"/>
               </a:rPr>
-              <a:t>: 리간드가 없으면 α는 GDP를 붙잡고 βγ와 결합한 삼량체 상태로 막에 붙어 있다. 2. </a:t>
-            </a:r>
+              <a:t>: 리간드가 없으면 α는 GDP를 붙잡고 βγ와 결합한 삼량체 상태로 막에 붙어 있다.</a:t>
+            </a:r>
+          </a:p>
+          <a:p>
+            <a:pPr>
+              <a:spcAft>
+                <a:spcPts val="900"/>
+              </a:spcAft>
+            </a:pPr>
             <a:r>
               <a:rPr sz="1600" b="1" i="0">
                 <a:solidFill>
+                  <a:srgbClr val="F2B705"/>
+                </a:solidFill>
+                <a:latin typeface="Malgun Gothic"/>
+                <a:ea typeface="Malgun Gothic"/>
+                <a:cs typeface="Malgun Gothic"/>
+              </a:rPr>
+              <a:t>•  </a:t>
+            </a:r>
+            <a:r>
+              <a:rPr sz="1600" b="0" i="0">
+                <a:solidFill>
+                  <a:srgbClr val="11202B"/>
+                </a:solidFill>
+                <a:latin typeface="Malgun Gothic"/>
+                <a:ea typeface="Malgun Gothic"/>
+                <a:cs typeface="Malgun Gothic"/>
+              </a:rPr>
+              <a:t>2. </a:t>
+            </a:r>
+            <a:r>
+              <a:rPr sz="1600" b="1" i="0">
+                <a:solidFill>
                   <a:srgbClr val="11202B"/>
                 </a:solidFill>
                 <a:latin typeface="Malgun Gothic"/>
@@ -6795,11 +6824,40 @@
                 <a:ea typeface="Malgun Gothic"/>
                 <a:cs typeface="Malgun Gothic"/>
               </a:rPr>
-              <a:t> 수용체가 교환인자(GEF)로 작동하는 것이다. 3. </a:t>
-            </a:r>
+              <a:t> 수용체가 교환인자(GEF)로 작동하는 것이다.</a:t>
+            </a:r>
+          </a:p>
+          <a:p>
+            <a:pPr>
+              <a:spcAft>
+                <a:spcPts val="900"/>
+              </a:spcAft>
+            </a:pPr>
             <a:r>
               <a:rPr sz="1600" b="1" i="0">
                 <a:solidFill>
+                  <a:srgbClr val="F2B705"/>
+                </a:solidFill>
+                <a:latin typeface="Malgun Gothic"/>
+                <a:ea typeface="Malgun Gothic"/>
+                <a:cs typeface="Malgun Gothic"/>
+              </a:rPr>
+              <a:t>•  </a:t>
+            </a:r>
+            <a:r>
+              <a:rPr sz="1600" b="0" i="0">
+                <a:solidFill>
+                  <a:srgbClr val="11202B"/>
+                </a:solidFill>
+                <a:latin typeface="Malgun Gothic"/>
+                <a:ea typeface="Malgun Gothic"/>
+                <a:cs typeface="Malgun Gothic"/>
+              </a:rPr>
+              <a:t>3. </a:t>
+            </a:r>
+            <a:r>
+              <a:rPr sz="1600" b="1" i="0">
+                <a:solidFill>
                   <a:srgbClr val="11202B"/>
                 </a:solidFill>
                 <a:latin typeface="Malgun Gothic"/>
@@ -6830,6 +6888,24 @@
               </a:rPr>
               <a:t>α와 βγ가 모두 하류 표적을 조절한다.</a:t>
             </a:r>
+          </a:p>
+          <a:p>
+            <a:pPr>
+              <a:spcAft>
+                <a:spcPts val="900"/>
+              </a:spcAft>
+            </a:pPr>
+            <a:r>
+              <a:rPr sz="1600" b="1" i="0">
+                <a:solidFill>
+                  <a:srgbClr val="F2B705"/>
+                </a:solidFill>
+                <a:latin typeface="Malgun Gothic"/>
+                <a:ea typeface="Malgun Gothic"/>
+                <a:cs typeface="Malgun Gothic"/>
+              </a:rPr>
+              <a:t>•  </a:t>
+            </a:r>
             <a:r>
               <a:rPr sz="1600" b="0" i="0">
                 <a:solidFill>
@@ -6839,7 +6915,7 @@
                 <a:ea typeface="Malgun Gothic"/>
                 <a:cs typeface="Malgun Gothic"/>
               </a:rPr>
-              <a:t> 4. </a:t>
+              <a:t>4. </a:t>
             </a:r>
             <a:r>
               <a:rPr sz="1600" b="1" i="0">
@@ -9177,11 +9253,98 @@
                 <a:ea typeface="Malgun Gothic"/>
                 <a:cs typeface="Malgun Gothic"/>
               </a:rPr>
-              <a:t>1. 리간드가 Gs 연결 수용체에 결합한다. 2. Gsα-GTP가 adenylyl cyclase를 활성화한다. 3. cAMP가 수 초 안에 수십 배로 증가한다. 4. cAMP가 </a:t>
-            </a:r>
+              <a:t>1. 리간드가 Gs 연결 수용체에 결합한다.</a:t>
+            </a:r>
+          </a:p>
+          <a:p>
+            <a:pPr>
+              <a:spcAft>
+                <a:spcPts val="900"/>
+              </a:spcAft>
+            </a:pPr>
             <a:r>
               <a:rPr sz="1400" b="1" i="0">
                 <a:solidFill>
+                  <a:srgbClr val="F2B705"/>
+                </a:solidFill>
+                <a:latin typeface="Malgun Gothic"/>
+                <a:ea typeface="Malgun Gothic"/>
+                <a:cs typeface="Malgun Gothic"/>
+              </a:rPr>
+              <a:t>•  </a:t>
+            </a:r>
+            <a:r>
+              <a:rPr sz="1400" b="0" i="0">
+                <a:solidFill>
+                  <a:srgbClr val="11202B"/>
+                </a:solidFill>
+                <a:latin typeface="Malgun Gothic"/>
+                <a:ea typeface="Malgun Gothic"/>
+                <a:cs typeface="Malgun Gothic"/>
+              </a:rPr>
+              <a:t>2. Gsα-GTP가 adenylyl cyclase를 활성화한다.</a:t>
+            </a:r>
+          </a:p>
+          <a:p>
+            <a:pPr>
+              <a:spcAft>
+                <a:spcPts val="900"/>
+              </a:spcAft>
+            </a:pPr>
+            <a:r>
+              <a:rPr sz="1400" b="1" i="0">
+                <a:solidFill>
+                  <a:srgbClr val="F2B705"/>
+                </a:solidFill>
+                <a:latin typeface="Malgun Gothic"/>
+                <a:ea typeface="Malgun Gothic"/>
+                <a:cs typeface="Malgun Gothic"/>
+              </a:rPr>
+              <a:t>•  </a:t>
+            </a:r>
+            <a:r>
+              <a:rPr sz="1400" b="0" i="0">
+                <a:solidFill>
+                  <a:srgbClr val="11202B"/>
+                </a:solidFill>
+                <a:latin typeface="Malgun Gothic"/>
+                <a:ea typeface="Malgun Gothic"/>
+                <a:cs typeface="Malgun Gothic"/>
+              </a:rPr>
+              <a:t>3. cAMP가 수 초 안에 수십 배로 증가한다.</a:t>
+            </a:r>
+          </a:p>
+          <a:p>
+            <a:pPr>
+              <a:spcAft>
+                <a:spcPts val="900"/>
+              </a:spcAft>
+            </a:pPr>
+            <a:r>
+              <a:rPr sz="1400" b="1" i="0">
+                <a:solidFill>
+                  <a:srgbClr val="F2B705"/>
+                </a:solidFill>
+                <a:latin typeface="Malgun Gothic"/>
+                <a:ea typeface="Malgun Gothic"/>
+                <a:cs typeface="Malgun Gothic"/>
+              </a:rPr>
+              <a:t>•  </a:t>
+            </a:r>
+            <a:r>
+              <a:rPr sz="1400" b="0" i="0">
+                <a:solidFill>
+                  <a:srgbClr val="11202B"/>
+                </a:solidFill>
+                <a:latin typeface="Malgun Gothic"/>
+                <a:ea typeface="Malgun Gothic"/>
+                <a:cs typeface="Malgun Gothic"/>
+              </a:rPr>
+              <a:t>4. cAMP가 </a:t>
+            </a:r>
+            <a:r>
+              <a:rPr sz="1400" b="1" i="0">
+                <a:solidFill>
                   <a:srgbClr val="11202B"/>
                 </a:solidFill>
                 <a:latin typeface="Malgun Gothic"/>
@@ -9199,7 +9362,36 @@
                 <a:ea typeface="Malgun Gothic"/>
                 <a:cs typeface="Malgun Gothic"/>
               </a:rPr>
-              <a:t>의 조절 소단위에 결합한다. PKA는 조절 소단위 둘과 촉매 소단위 둘로 된 사량체인데, cAMP가 네 분자 결합하면 촉매 소단위가 풀려나 활성화된다. 5. 활성 PKA가 표적 단백질의 serine과 threonine을 인산화한다. 표적은 세포질의 효소와 핵의 전사인자(CREB) 양쪽에 있다.</a:t>
+              <a:t>의 조절 소단위에 결합한다. PKA는 조절 소단위 둘과 촉매 소단위 둘로 된 사량체인데, cAMP가 네 분자 결합하면 촉매 소단위가 풀려나 활성화된다.</a:t>
+            </a:r>
+          </a:p>
+          <a:p>
+            <a:pPr>
+              <a:spcAft>
+                <a:spcPts val="900"/>
+              </a:spcAft>
+            </a:pPr>
+            <a:r>
+              <a:rPr sz="1400" b="1" i="0">
+                <a:solidFill>
+                  <a:srgbClr val="F2B705"/>
+                </a:solidFill>
+                <a:latin typeface="Malgun Gothic"/>
+                <a:ea typeface="Malgun Gothic"/>
+                <a:cs typeface="Malgun Gothic"/>
+              </a:rPr>
+              <a:t>•  </a:t>
+            </a:r>
+            <a:r>
+              <a:rPr sz="1400" b="0" i="0">
+                <a:solidFill>
+                  <a:srgbClr val="11202B"/>
+                </a:solidFill>
+                <a:latin typeface="Malgun Gothic"/>
+                <a:ea typeface="Malgun Gothic"/>
+                <a:cs typeface="Malgun Gothic"/>
+              </a:rPr>
+              <a:t>5. 활성 PKA가 표적 단백질의 serine과 threonine을 인산화한다. 표적은 세포질의 효소와 핵의 전사인자(CREB) 양쪽에 있다.</a:t>
             </a:r>
           </a:p>
           <a:p>
@@ -11283,11 +11475,40 @@
                 <a:ea typeface="Malgun Gothic"/>
                 <a:cs typeface="Malgun Gothic"/>
               </a:rPr>
-              <a:t>를 활성화한다. 2. PLC가 막의 인지질 </a:t>
-            </a:r>
+              <a:t>를 활성화한다.</a:t>
+            </a:r>
+          </a:p>
+          <a:p>
+            <a:pPr>
+              <a:spcAft>
+                <a:spcPts val="900"/>
+              </a:spcAft>
+            </a:pPr>
             <a:r>
               <a:rPr sz="1400" b="1" i="0">
                 <a:solidFill>
+                  <a:srgbClr val="F2B705"/>
+                </a:solidFill>
+                <a:latin typeface="Malgun Gothic"/>
+                <a:ea typeface="Malgun Gothic"/>
+                <a:cs typeface="Malgun Gothic"/>
+              </a:rPr>
+              <a:t>•  </a:t>
+            </a:r>
+            <a:r>
+              <a:rPr sz="1400" b="0" i="0">
+                <a:solidFill>
+                  <a:srgbClr val="11202B"/>
+                </a:solidFill>
+                <a:latin typeface="Malgun Gothic"/>
+                <a:ea typeface="Malgun Gothic"/>
+                <a:cs typeface="Malgun Gothic"/>
+              </a:rPr>
+              <a:t>2. PLC가 막의 인지질 </a:t>
+            </a:r>
+            <a:r>
+              <a:rPr sz="1400" b="1" i="0">
+                <a:solidFill>
                   <a:srgbClr val="11202B"/>
                 </a:solidFill>
                 <a:latin typeface="Malgun Gothic"/>
@@ -11349,11 +11570,40 @@
                 <a:ea typeface="Malgun Gothic"/>
                 <a:cs typeface="Malgun Gothic"/>
               </a:rPr>
-              <a:t>다. 3. </a:t>
-            </a:r>
+              <a:t>다.</a:t>
+            </a:r>
+          </a:p>
+          <a:p>
+            <a:pPr>
+              <a:spcAft>
+                <a:spcPts val="900"/>
+              </a:spcAft>
+            </a:pPr>
             <a:r>
               <a:rPr sz="1400" b="1" i="0">
                 <a:solidFill>
+                  <a:srgbClr val="F2B705"/>
+                </a:solidFill>
+                <a:latin typeface="Malgun Gothic"/>
+                <a:ea typeface="Malgun Gothic"/>
+                <a:cs typeface="Malgun Gothic"/>
+              </a:rPr>
+              <a:t>•  </a:t>
+            </a:r>
+            <a:r>
+              <a:rPr sz="1400" b="0" i="0">
+                <a:solidFill>
+                  <a:srgbClr val="11202B"/>
+                </a:solidFill>
+                <a:latin typeface="Malgun Gothic"/>
+                <a:ea typeface="Malgun Gothic"/>
+                <a:cs typeface="Malgun Gothic"/>
+              </a:rPr>
+              <a:t>3. </a:t>
+            </a:r>
+            <a:r>
+              <a:rPr sz="1400" b="1" i="0">
+                <a:solidFill>
                   <a:srgbClr val="11202B"/>
                 </a:solidFill>
                 <a:latin typeface="Malgun Gothic"/>
@@ -11384,6 +11634,24 @@
               </a:rPr>
               <a:t>소포체에 저장된 Ca²⁺을 세포질로 방출한다.</a:t>
             </a:r>
+          </a:p>
+          <a:p>
+            <a:pPr>
+              <a:spcAft>
+                <a:spcPts val="900"/>
+              </a:spcAft>
+            </a:pPr>
+            <a:r>
+              <a:rPr sz="1400" b="1" i="0">
+                <a:solidFill>
+                  <a:srgbClr val="F2B705"/>
+                </a:solidFill>
+                <a:latin typeface="Malgun Gothic"/>
+                <a:ea typeface="Malgun Gothic"/>
+                <a:cs typeface="Malgun Gothic"/>
+              </a:rPr>
+              <a:t>•  </a:t>
+            </a:r>
             <a:r>
               <a:rPr sz="1400" b="0" i="0">
                 <a:solidFill>
@@ -11393,7 +11661,7 @@
                 <a:ea typeface="Malgun Gothic"/>
                 <a:cs typeface="Malgun Gothic"/>
               </a:rPr>
-              <a:t> 4. </a:t>
+              <a:t>4. </a:t>
             </a:r>
             <a:r>
               <a:rPr sz="1400" b="1" i="0">
@@ -13304,11 +13572,40 @@
                 <a:ea typeface="Malgun Gothic"/>
                 <a:cs typeface="Malgun Gothic"/>
               </a:rPr>
-              <a:t>1. 리간드가 두 수용체 분자를 가까이 묶는다. 리간드 자체가 두 결합 부위를 가지거나, 리간드 두 분자가 두 수용체를 붙잡는다. 2. 가까워진 두 kinase 영역이 </a:t>
-            </a:r>
+              <a:t>1. 리간드가 두 수용체 분자를 가까이 묶는다. 리간드 자체가 두 결합 부위를 가지거나, 리간드 두 분자가 두 수용체를 붙잡는다.</a:t>
+            </a:r>
+          </a:p>
+          <a:p>
+            <a:pPr>
+              <a:spcAft>
+                <a:spcPts val="900"/>
+              </a:spcAft>
+            </a:pPr>
             <a:r>
               <a:rPr sz="1400" b="1" i="0">
                 <a:solidFill>
+                  <a:srgbClr val="F2B705"/>
+                </a:solidFill>
+                <a:latin typeface="Malgun Gothic"/>
+                <a:ea typeface="Malgun Gothic"/>
+                <a:cs typeface="Malgun Gothic"/>
+              </a:rPr>
+              <a:t>•  </a:t>
+            </a:r>
+            <a:r>
+              <a:rPr sz="1400" b="0" i="0">
+                <a:solidFill>
+                  <a:srgbClr val="11202B"/>
+                </a:solidFill>
+                <a:latin typeface="Malgun Gothic"/>
+                <a:ea typeface="Malgun Gothic"/>
+                <a:cs typeface="Malgun Gothic"/>
+              </a:rPr>
+              <a:t>2. 가까워진 두 kinase 영역이 </a:t>
+            </a:r>
+            <a:r>
+              <a:rPr sz="1400" b="1" i="0">
+                <a:solidFill>
                   <a:srgbClr val="11202B"/>
                 </a:solidFill>
                 <a:latin typeface="Malgun Gothic"/>
@@ -13326,7 +13623,36 @@
                 <a:ea typeface="Malgun Gothic"/>
                 <a:cs typeface="Malgun Gothic"/>
               </a:rPr>
-              <a:t> 먼저 활성화 고리를 인산화해 활성을 올리고, 이어 꼬리의 여러 tyrosine을 인산화한다. 3. 인산화된 tyrosine이 </a:t>
+              <a:t> 먼저 활성화 고리를 인산화해 활성을 올리고, 이어 꼬리의 여러 tyrosine을 인산화한다.</a:t>
+            </a:r>
+          </a:p>
+          <a:p>
+            <a:pPr>
+              <a:spcAft>
+                <a:spcPts val="900"/>
+              </a:spcAft>
+            </a:pPr>
+            <a:r>
+              <a:rPr sz="1400" b="1" i="0">
+                <a:solidFill>
+                  <a:srgbClr val="F2B705"/>
+                </a:solidFill>
+                <a:latin typeface="Malgun Gothic"/>
+                <a:ea typeface="Malgun Gothic"/>
+                <a:cs typeface="Malgun Gothic"/>
+              </a:rPr>
+              <a:t>•  </a:t>
+            </a:r>
+            <a:r>
+              <a:rPr sz="1400" b="0" i="0">
+                <a:solidFill>
+                  <a:srgbClr val="11202B"/>
+                </a:solidFill>
+                <a:latin typeface="Malgun Gothic"/>
+                <a:ea typeface="Malgun Gothic"/>
+                <a:cs typeface="Malgun Gothic"/>
+              </a:rPr>
+              <a:t>3. 인산화된 tyrosine이 </a:t>
             </a:r>
             <a:r>
               <a:rPr sz="1400" b="1" i="0">
@@ -15204,7 +15530,7 @@
               </a:spcAft>
             </a:pPr>
             <a:r>
-              <a:rPr sz="1400" b="1" i="0">
+              <a:rPr sz="1600" b="1" i="0">
                 <a:solidFill>
                   <a:srgbClr val="F2B705"/>
                 </a:solidFill>
@@ -15215,7 +15541,7 @@
               <a:t>•  </a:t>
             </a:r>
             <a:r>
-              <a:rPr sz="1400" b="0" i="0">
+              <a:rPr sz="1600" b="0" i="0">
                 <a:solidFill>
                   <a:srgbClr val="11202B"/>
                 </a:solidFill>
@@ -15233,7 +15559,7 @@
               </a:spcAft>
             </a:pPr>
             <a:r>
-              <a:rPr sz="1400" b="1" i="0">
+              <a:rPr sz="1600" b="1" i="0">
                 <a:solidFill>
                   <a:srgbClr val="F2B705"/>
                 </a:solidFill>
@@ -15244,7 +15570,7 @@
               <a:t>•  </a:t>
             </a:r>
             <a:r>
-              <a:rPr sz="1400" b="1" i="0">
+              <a:rPr sz="1600" b="1" i="0">
                 <a:solidFill>
                   <a:srgbClr val="11202B"/>
                 </a:solidFill>
@@ -15262,7 +15588,7 @@
               </a:spcAft>
             </a:pPr>
             <a:r>
-              <a:rPr sz="1400" b="1" i="0">
+              <a:rPr sz="1600" b="1" i="0">
                 <a:solidFill>
                   <a:srgbClr val="F2B705"/>
                 </a:solidFill>
@@ -15273,125 +15599,15 @@
               <a:t>•  </a:t>
             </a:r>
             <a:r>
-              <a:rPr sz="1400" b="0" i="0">
-                <a:solidFill>
-                  <a:srgbClr val="11202B"/>
-                </a:solidFill>
-                <a:latin typeface="Malgun Gothic"/>
-                <a:ea typeface="Malgun Gothic"/>
-                <a:cs typeface="Malgun Gothic"/>
-              </a:rPr>
-              <a:t>1. GRB2가 수용체의 인산화 tyrosine에 결합하고 SOS를 데려온다. 2. SOS가 </a:t>
-            </a:r>
-            <a:r>
-              <a:rPr sz="1400" b="1" i="0">
-                <a:solidFill>
-                  <a:srgbClr val="11202B"/>
-                </a:solidFill>
-                <a:latin typeface="Malgun Gothic"/>
-                <a:ea typeface="Malgun Gothic"/>
-                <a:cs typeface="Malgun Gothic"/>
-              </a:rPr>
-              <a:t>Ras</a:t>
-            </a:r>
-            <a:r>
-              <a:rPr sz="1400" b="0" i="0">
-                <a:solidFill>
-                  <a:srgbClr val="11202B"/>
-                </a:solidFill>
-                <a:latin typeface="Malgun Gothic"/>
-                <a:ea typeface="Malgun Gothic"/>
-                <a:cs typeface="Malgun Gothic"/>
-              </a:rPr>
-              <a:t>의 GDP를 GTP로 교환시킨다. Ras는 막에 고정된 작은 GTPase이며, prenylation으로 막에 붙어 있다(M01-W08-L01). 3. Ras-GTP가 </a:t>
-            </a:r>
-            <a:r>
-              <a:rPr sz="1400" b="1" i="0">
-                <a:solidFill>
-                  <a:srgbClr val="11202B"/>
-                </a:solidFill>
-                <a:latin typeface="Malgun Gothic"/>
-                <a:ea typeface="Malgun Gothic"/>
-                <a:cs typeface="Malgun Gothic"/>
-              </a:rPr>
-              <a:t>RAF</a:t>
-            </a:r>
-            <a:r>
-              <a:rPr sz="1400" b="0" i="0">
-                <a:solidFill>
-                  <a:srgbClr val="11202B"/>
-                </a:solidFill>
-                <a:latin typeface="Malgun Gothic"/>
-                <a:ea typeface="Malgun Gothic"/>
-                <a:cs typeface="Malgun Gothic"/>
-              </a:rPr>
-              <a:t>(MAP kinase kinase kinase)를 활성화한다. 4. RAF가 </a:t>
-            </a:r>
-            <a:r>
-              <a:rPr sz="1400" b="1" i="0">
-                <a:solidFill>
-                  <a:srgbClr val="11202B"/>
-                </a:solidFill>
-                <a:latin typeface="Malgun Gothic"/>
-                <a:ea typeface="Malgun Gothic"/>
-                <a:cs typeface="Malgun Gothic"/>
-              </a:rPr>
-              <a:t>MEK</a:t>
-            </a:r>
-            <a:r>
-              <a:rPr sz="1400" b="0" i="0">
-                <a:solidFill>
-                  <a:srgbClr val="11202B"/>
-                </a:solidFill>
-                <a:latin typeface="Malgun Gothic"/>
-                <a:ea typeface="Malgun Gothic"/>
-                <a:cs typeface="Malgun Gothic"/>
-              </a:rPr>
-              <a:t>를, MEK가 </a:t>
-            </a:r>
-            <a:r>
-              <a:rPr sz="1400" b="1" i="0">
-                <a:solidFill>
-                  <a:srgbClr val="11202B"/>
-                </a:solidFill>
-                <a:latin typeface="Malgun Gothic"/>
-                <a:ea typeface="Malgun Gothic"/>
-                <a:cs typeface="Malgun Gothic"/>
-              </a:rPr>
-              <a:t>ERK</a:t>
-            </a:r>
-            <a:r>
-              <a:rPr sz="1400" b="0" i="0">
-                <a:solidFill>
-                  <a:srgbClr val="11202B"/>
-                </a:solidFill>
-                <a:latin typeface="Malgun Gothic"/>
-                <a:ea typeface="Malgun Gothic"/>
-                <a:cs typeface="Malgun Gothic"/>
-              </a:rPr>
-              <a:t>를 인산화한다. 세 단계의 kinase 연쇄다. 5. ERK가 세포질의 표적을 인산화하고 일부는 핵으로 들어가 전사인자를 인산화해 </a:t>
-            </a:r>
-            <a:r>
-              <a:rPr sz="1400" b="1" i="0">
-                <a:solidFill>
-                  <a:srgbClr val="11202B"/>
-                </a:solidFill>
-                <a:latin typeface="Malgun Gothic"/>
-                <a:ea typeface="Malgun Gothic"/>
-                <a:cs typeface="Malgun Gothic"/>
-              </a:rPr>
-              <a:t>세포주기 진입과 증식에 필요한 유전자</a:t>
-            </a:r>
-            <a:r>
-              <a:rPr sz="1400" b="0" i="0">
-                <a:solidFill>
-                  <a:srgbClr val="11202B"/>
-                </a:solidFill>
-                <a:latin typeface="Malgun Gothic"/>
-                <a:ea typeface="Malgun Gothic"/>
-                <a:cs typeface="Malgun Gothic"/>
-              </a:rPr>
-              <a:t>를 켠다.</a:t>
+              <a:rPr sz="1600" b="0" i="0">
+                <a:solidFill>
+                  <a:srgbClr val="11202B"/>
+                </a:solidFill>
+                <a:latin typeface="Malgun Gothic"/>
+                <a:ea typeface="Malgun Gothic"/>
+                <a:cs typeface="Malgun Gothic"/>
+              </a:rPr>
+              <a:t>1. GRB2가 수용체의 인산화 tyrosine에 결합하고 SOS를 데려온다.</a:t>
             </a:r>
           </a:p>
           <a:p>
@@ -15401,7 +15617,7 @@
               </a:spcAft>
             </a:pPr>
             <a:r>
-              <a:rPr sz="1400" b="1" i="0">
+              <a:rPr sz="1600" b="1" i="0">
                 <a:solidFill>
                   <a:srgbClr val="F2B705"/>
                 </a:solidFill>
@@ -15412,81 +15628,37 @@
               <a:t>•  </a:t>
             </a:r>
             <a:r>
-              <a:rPr sz="1400" b="0" i="0">
-                <a:solidFill>
-                  <a:srgbClr val="11202B"/>
-                </a:solidFill>
-                <a:latin typeface="Malgun Gothic"/>
-                <a:ea typeface="Malgun Gothic"/>
-                <a:cs typeface="Malgun Gothic"/>
-              </a:rPr>
-              <a:t>세 단계 연쇄의 의미가 두 가지다. </a:t>
-            </a:r>
-            <a:r>
-              <a:rPr sz="1400" b="1" i="0">
-                <a:solidFill>
-                  <a:srgbClr val="11202B"/>
-                </a:solidFill>
-                <a:latin typeface="Malgun Gothic"/>
-                <a:ea typeface="Malgun Gothic"/>
-                <a:cs typeface="Malgun Gothic"/>
-              </a:rPr>
-              <a:t>증폭</a:t>
-            </a:r>
-            <a:r>
-              <a:rPr sz="1400" b="0" i="0">
-                <a:solidFill>
-                  <a:srgbClr val="11202B"/>
-                </a:solidFill>
-                <a:latin typeface="Malgun Gothic"/>
-                <a:ea typeface="Malgun Gothic"/>
-                <a:cs typeface="Malgun Gothic"/>
-              </a:rPr>
-              <a:t>이 단계마다 일어나고, 각 단계가 </a:t>
-            </a:r>
-            <a:r>
-              <a:rPr sz="1400" b="1" i="0">
-                <a:solidFill>
-                  <a:srgbClr val="11202B"/>
-                </a:solidFill>
-                <a:latin typeface="Malgun Gothic"/>
-                <a:ea typeface="Malgun Gothic"/>
-                <a:cs typeface="Malgun Gothic"/>
-              </a:rPr>
-              <a:t>조절 지점</a:t>
-            </a:r>
-            <a:r>
-              <a:rPr sz="1400" b="0" i="0">
-                <a:solidFill>
-                  <a:srgbClr val="11202B"/>
-                </a:solidFill>
-                <a:latin typeface="Malgun Gothic"/>
-                <a:ea typeface="Malgun Gothic"/>
-                <a:cs typeface="Malgun Gothic"/>
-              </a:rPr>
-              <a:t>이 된다. 또 연쇄의 길이가 입력-출력 관계를 가파르게 만들어, 약한 신호는 걸러지고 역치를 넘는 신호만 통과하는 </a:t>
-            </a:r>
-            <a:r>
-              <a:rPr sz="1400" b="1" i="0">
-                <a:solidFill>
-                  <a:srgbClr val="11202B"/>
-                </a:solidFill>
-                <a:latin typeface="Malgun Gothic"/>
-                <a:ea typeface="Malgun Gothic"/>
-                <a:cs typeface="Malgun Gothic"/>
-              </a:rPr>
-              <a:t>스위치 같은 반응</a:t>
-            </a:r>
-            <a:r>
-              <a:rPr sz="1400" b="0" i="0">
-                <a:solidFill>
-                  <a:srgbClr val="11202B"/>
-                </a:solidFill>
-                <a:latin typeface="Malgun Gothic"/>
-                <a:ea typeface="Malgun Gothic"/>
-                <a:cs typeface="Malgun Gothic"/>
-              </a:rPr>
-              <a:t>이 된다.</a:t>
+              <a:rPr sz="1600" b="0" i="0">
+                <a:solidFill>
+                  <a:srgbClr val="11202B"/>
+                </a:solidFill>
+                <a:latin typeface="Malgun Gothic"/>
+                <a:ea typeface="Malgun Gothic"/>
+                <a:cs typeface="Malgun Gothic"/>
+              </a:rPr>
+              <a:t>2. SOS가 </a:t>
+            </a:r>
+            <a:r>
+              <a:rPr sz="1600" b="1" i="0">
+                <a:solidFill>
+                  <a:srgbClr val="11202B"/>
+                </a:solidFill>
+                <a:latin typeface="Malgun Gothic"/>
+                <a:ea typeface="Malgun Gothic"/>
+                <a:cs typeface="Malgun Gothic"/>
+              </a:rPr>
+              <a:t>Ras</a:t>
+            </a:r>
+            <a:r>
+              <a:rPr sz="1600" b="0" i="0">
+                <a:solidFill>
+                  <a:srgbClr val="11202B"/>
+                </a:solidFill>
+                <a:latin typeface="Malgun Gothic"/>
+                <a:ea typeface="Malgun Gothic"/>
+                <a:cs typeface="Malgun Gothic"/>
+              </a:rPr>
+              <a:t>의 GDP를 GTP로 교환시킨다. Ras는 막에 고정된 작은 GTPase이며, prenylation으로 막에 붙어 있다(M01-W08-L01).</a:t>
             </a:r>
           </a:p>
           <a:p>
@@ -15496,7 +15668,7 @@
               </a:spcAft>
             </a:pPr>
             <a:r>
-              <a:rPr sz="1400" b="1" i="0">
+              <a:rPr sz="1600" b="1" i="0">
                 <a:solidFill>
                   <a:srgbClr val="F2B705"/>
                 </a:solidFill>
@@ -15507,15 +15679,37 @@
               <a:t>•  </a:t>
             </a:r>
             <a:r>
-              <a:rPr sz="1400" b="1" i="0">
-                <a:solidFill>
-                  <a:srgbClr val="11202B"/>
-                </a:solidFill>
-                <a:latin typeface="Malgun Gothic"/>
-                <a:ea typeface="Malgun Gothic"/>
-                <a:cs typeface="Malgun Gothic"/>
-              </a:rPr>
-              <a:t>PI3K-AKT 경로</a:t>
+              <a:rPr sz="1600" b="0" i="0">
+                <a:solidFill>
+                  <a:srgbClr val="11202B"/>
+                </a:solidFill>
+                <a:latin typeface="Malgun Gothic"/>
+                <a:ea typeface="Malgun Gothic"/>
+                <a:cs typeface="Malgun Gothic"/>
+              </a:rPr>
+              <a:t>3. Ras-GTP가 </a:t>
+            </a:r>
+            <a:r>
+              <a:rPr sz="1600" b="1" i="0">
+                <a:solidFill>
+                  <a:srgbClr val="11202B"/>
+                </a:solidFill>
+                <a:latin typeface="Malgun Gothic"/>
+                <a:ea typeface="Malgun Gothic"/>
+                <a:cs typeface="Malgun Gothic"/>
+              </a:rPr>
+              <a:t>RAF</a:t>
+            </a:r>
+            <a:r>
+              <a:rPr sz="1600" b="0" i="0">
+                <a:solidFill>
+                  <a:srgbClr val="11202B"/>
+                </a:solidFill>
+                <a:latin typeface="Malgun Gothic"/>
+                <a:ea typeface="Malgun Gothic"/>
+                <a:cs typeface="Malgun Gothic"/>
+              </a:rPr>
+              <a:t>(MAP kinase kinase kinase)를 활성화한다.</a:t>
             </a:r>
           </a:p>
           <a:p>
@@ -15525,7 +15719,7 @@
               </a:spcAft>
             </a:pPr>
             <a:r>
-              <a:rPr sz="1400" b="1" i="0">
+              <a:rPr sz="1600" b="1" i="0">
                 <a:solidFill>
                   <a:srgbClr val="F2B705"/>
                 </a:solidFill>
@@ -15536,18 +15730,295 @@
               <a:t>•  </a:t>
             </a:r>
             <a:r>
-              <a:rPr sz="1400" b="0" i="0">
-                <a:solidFill>
-                  <a:srgbClr val="11202B"/>
-                </a:solidFill>
-                <a:latin typeface="Malgun Gothic"/>
-                <a:ea typeface="Malgun Gothic"/>
-                <a:cs typeface="Malgun Gothic"/>
-              </a:rPr>
-              <a:t>1. PI3K가 수용체나 adaptor에 모인다. 2. PI3K가 막의 </a:t>
-            </a:r>
-            <a:r>
-              <a:rPr sz="1400" b="1" i="0">
+              <a:rPr sz="1600" b="0" i="0">
+                <a:solidFill>
+                  <a:srgbClr val="11202B"/>
+                </a:solidFill>
+                <a:latin typeface="Malgun Gothic"/>
+                <a:ea typeface="Malgun Gothic"/>
+                <a:cs typeface="Malgun Gothic"/>
+              </a:rPr>
+              <a:t>4. RAF가 </a:t>
+            </a:r>
+            <a:r>
+              <a:rPr sz="1600" b="1" i="0">
+                <a:solidFill>
+                  <a:srgbClr val="11202B"/>
+                </a:solidFill>
+                <a:latin typeface="Malgun Gothic"/>
+                <a:ea typeface="Malgun Gothic"/>
+                <a:cs typeface="Malgun Gothic"/>
+              </a:rPr>
+              <a:t>MEK</a:t>
+            </a:r>
+            <a:r>
+              <a:rPr sz="1600" b="0" i="0">
+                <a:solidFill>
+                  <a:srgbClr val="11202B"/>
+                </a:solidFill>
+                <a:latin typeface="Malgun Gothic"/>
+                <a:ea typeface="Malgun Gothic"/>
+                <a:cs typeface="Malgun Gothic"/>
+              </a:rPr>
+              <a:t>를, MEK가 </a:t>
+            </a:r>
+            <a:r>
+              <a:rPr sz="1600" b="1" i="0">
+                <a:solidFill>
+                  <a:srgbClr val="11202B"/>
+                </a:solidFill>
+                <a:latin typeface="Malgun Gothic"/>
+                <a:ea typeface="Malgun Gothic"/>
+                <a:cs typeface="Malgun Gothic"/>
+              </a:rPr>
+              <a:t>ERK</a:t>
+            </a:r>
+            <a:r>
+              <a:rPr sz="1600" b="0" i="0">
+                <a:solidFill>
+                  <a:srgbClr val="11202B"/>
+                </a:solidFill>
+                <a:latin typeface="Malgun Gothic"/>
+                <a:ea typeface="Malgun Gothic"/>
+                <a:cs typeface="Malgun Gothic"/>
+              </a:rPr>
+              <a:t>를 인산화한다. 세 단계의 kinase 연쇄다.</a:t>
+            </a:r>
+          </a:p>
+          <a:p>
+            <a:pPr>
+              <a:spcAft>
+                <a:spcPts val="900"/>
+              </a:spcAft>
+            </a:pPr>
+            <a:r>
+              <a:rPr sz="1600" b="1" i="0">
+                <a:solidFill>
+                  <a:srgbClr val="F2B705"/>
+                </a:solidFill>
+                <a:latin typeface="Malgun Gothic"/>
+                <a:ea typeface="Malgun Gothic"/>
+                <a:cs typeface="Malgun Gothic"/>
+              </a:rPr>
+              <a:t>•  </a:t>
+            </a:r>
+            <a:r>
+              <a:rPr sz="1600" b="0" i="0">
+                <a:solidFill>
+                  <a:srgbClr val="11202B"/>
+                </a:solidFill>
+                <a:latin typeface="Malgun Gothic"/>
+                <a:ea typeface="Malgun Gothic"/>
+                <a:cs typeface="Malgun Gothic"/>
+              </a:rPr>
+              <a:t>5. ERK가 세포질의 표적을 인산화하고 일부는 핵으로 들어가 전사인자를 인산화해 </a:t>
+            </a:r>
+            <a:r>
+              <a:rPr sz="1600" b="1" i="0">
+                <a:solidFill>
+                  <a:srgbClr val="11202B"/>
+                </a:solidFill>
+                <a:latin typeface="Malgun Gothic"/>
+                <a:ea typeface="Malgun Gothic"/>
+                <a:cs typeface="Malgun Gothic"/>
+              </a:rPr>
+              <a:t>세포주기 진입과 증식에 필요한 유전자</a:t>
+            </a:r>
+            <a:r>
+              <a:rPr sz="1600" b="0" i="0">
+                <a:solidFill>
+                  <a:srgbClr val="11202B"/>
+                </a:solidFill>
+                <a:latin typeface="Malgun Gothic"/>
+                <a:ea typeface="Malgun Gothic"/>
+                <a:cs typeface="Malgun Gothic"/>
+              </a:rPr>
+              <a:t>를 켠다.</a:t>
+            </a:r>
+          </a:p>
+          <a:p>
+            <a:pPr>
+              <a:spcAft>
+                <a:spcPts val="900"/>
+              </a:spcAft>
+            </a:pPr>
+            <a:r>
+              <a:rPr sz="1600" b="1" i="0">
+                <a:solidFill>
+                  <a:srgbClr val="F2B705"/>
+                </a:solidFill>
+                <a:latin typeface="Malgun Gothic"/>
+                <a:ea typeface="Malgun Gothic"/>
+                <a:cs typeface="Malgun Gothic"/>
+              </a:rPr>
+              <a:t>•  </a:t>
+            </a:r>
+            <a:r>
+              <a:rPr sz="1600" b="0" i="0">
+                <a:solidFill>
+                  <a:srgbClr val="11202B"/>
+                </a:solidFill>
+                <a:latin typeface="Malgun Gothic"/>
+                <a:ea typeface="Malgun Gothic"/>
+                <a:cs typeface="Malgun Gothic"/>
+              </a:rPr>
+              <a:t>세 단계 연쇄의 의미가 두 가지다. </a:t>
+            </a:r>
+            <a:r>
+              <a:rPr sz="1600" b="1" i="0">
+                <a:solidFill>
+                  <a:srgbClr val="11202B"/>
+                </a:solidFill>
+                <a:latin typeface="Malgun Gothic"/>
+                <a:ea typeface="Malgun Gothic"/>
+                <a:cs typeface="Malgun Gothic"/>
+              </a:rPr>
+              <a:t>증폭</a:t>
+            </a:r>
+            <a:r>
+              <a:rPr sz="1600" b="0" i="0">
+                <a:solidFill>
+                  <a:srgbClr val="11202B"/>
+                </a:solidFill>
+                <a:latin typeface="Malgun Gothic"/>
+                <a:ea typeface="Malgun Gothic"/>
+                <a:cs typeface="Malgun Gothic"/>
+              </a:rPr>
+              <a:t>이 단계마다 일어나고, 각 단계가 </a:t>
+            </a:r>
+            <a:r>
+              <a:rPr sz="1600" b="1" i="0">
+                <a:solidFill>
+                  <a:srgbClr val="11202B"/>
+                </a:solidFill>
+                <a:latin typeface="Malgun Gothic"/>
+                <a:ea typeface="Malgun Gothic"/>
+                <a:cs typeface="Malgun Gothic"/>
+              </a:rPr>
+              <a:t>조절 지점</a:t>
+            </a:r>
+            <a:r>
+              <a:rPr sz="1600" b="0" i="0">
+                <a:solidFill>
+                  <a:srgbClr val="11202B"/>
+                </a:solidFill>
+                <a:latin typeface="Malgun Gothic"/>
+                <a:ea typeface="Malgun Gothic"/>
+                <a:cs typeface="Malgun Gothic"/>
+              </a:rPr>
+              <a:t>이 된다. 또 연쇄의 길이가 입력-출력 관계를 가파르게 만들어, 약한 신호는 걸러지고 역치를 넘는 신호만 통과하는 </a:t>
+            </a:r>
+            <a:r>
+              <a:rPr sz="1600" b="1" i="0">
+                <a:solidFill>
+                  <a:srgbClr val="11202B"/>
+                </a:solidFill>
+                <a:latin typeface="Malgun Gothic"/>
+                <a:ea typeface="Malgun Gothic"/>
+                <a:cs typeface="Malgun Gothic"/>
+              </a:rPr>
+              <a:t>스위치 같은 반응</a:t>
+            </a:r>
+            <a:r>
+              <a:rPr sz="1600" b="0" i="0">
+                <a:solidFill>
+                  <a:srgbClr val="11202B"/>
+                </a:solidFill>
+                <a:latin typeface="Malgun Gothic"/>
+                <a:ea typeface="Malgun Gothic"/>
+                <a:cs typeface="Malgun Gothic"/>
+              </a:rPr>
+              <a:t>이 된다.</a:t>
+            </a:r>
+          </a:p>
+          <a:p>
+            <a:pPr>
+              <a:spcAft>
+                <a:spcPts val="900"/>
+              </a:spcAft>
+            </a:pPr>
+            <a:r>
+              <a:rPr sz="1600" b="1" i="0">
+                <a:solidFill>
+                  <a:srgbClr val="F2B705"/>
+                </a:solidFill>
+                <a:latin typeface="Malgun Gothic"/>
+                <a:ea typeface="Malgun Gothic"/>
+                <a:cs typeface="Malgun Gothic"/>
+              </a:rPr>
+              <a:t>•  </a:t>
+            </a:r>
+            <a:r>
+              <a:rPr sz="1600" b="1" i="0">
+                <a:solidFill>
+                  <a:srgbClr val="11202B"/>
+                </a:solidFill>
+                <a:latin typeface="Malgun Gothic"/>
+                <a:ea typeface="Malgun Gothic"/>
+                <a:cs typeface="Malgun Gothic"/>
+              </a:rPr>
+              <a:t>PI3K-AKT 경로</a:t>
+            </a:r>
+          </a:p>
+          <a:p>
+            <a:pPr>
+              <a:spcAft>
+                <a:spcPts val="900"/>
+              </a:spcAft>
+            </a:pPr>
+            <a:r>
+              <a:rPr sz="1600" b="1" i="0">
+                <a:solidFill>
+                  <a:srgbClr val="F2B705"/>
+                </a:solidFill>
+                <a:latin typeface="Malgun Gothic"/>
+                <a:ea typeface="Malgun Gothic"/>
+                <a:cs typeface="Malgun Gothic"/>
+              </a:rPr>
+              <a:t>•  </a:t>
+            </a:r>
+            <a:r>
+              <a:rPr sz="1600" b="0" i="0">
+                <a:solidFill>
+                  <a:srgbClr val="11202B"/>
+                </a:solidFill>
+                <a:latin typeface="Malgun Gothic"/>
+                <a:ea typeface="Malgun Gothic"/>
+                <a:cs typeface="Malgun Gothic"/>
+              </a:rPr>
+              <a:t>1. PI3K가 수용체나 adaptor에 모인다.</a:t>
+            </a:r>
+          </a:p>
+          <a:p>
+            <a:pPr>
+              <a:spcAft>
+                <a:spcPts val="900"/>
+              </a:spcAft>
+            </a:pPr>
+            <a:r>
+              <a:rPr sz="1600" b="1" i="0">
+                <a:solidFill>
+                  <a:srgbClr val="F2B705"/>
+                </a:solidFill>
+                <a:latin typeface="Malgun Gothic"/>
+                <a:ea typeface="Malgun Gothic"/>
+                <a:cs typeface="Malgun Gothic"/>
+              </a:rPr>
+              <a:t>•  </a:t>
+            </a:r>
+            <a:r>
+              <a:rPr sz="1600" b="0" i="0">
+                <a:solidFill>
+                  <a:srgbClr val="11202B"/>
+                </a:solidFill>
+                <a:latin typeface="Malgun Gothic"/>
+                <a:ea typeface="Malgun Gothic"/>
+                <a:cs typeface="Malgun Gothic"/>
+              </a:rPr>
+              <a:t>2. PI3K가 막의 </a:t>
+            </a:r>
+            <a:r>
+              <a:rPr sz="1600" b="1" i="0">
                 <a:solidFill>
                   <a:srgbClr val="11202B"/>
                 </a:solidFill>
@@ -15558,37 +16029,15 @@
               <a:t>PIP₂를 PIP₃로</a:t>
             </a:r>
             <a:r>
-              <a:rPr sz="1400" b="0" i="0">
-                <a:solidFill>
-                  <a:srgbClr val="11202B"/>
-                </a:solidFill>
-                <a:latin typeface="Malgun Gothic"/>
-                <a:ea typeface="Malgun Gothic"/>
-                <a:cs typeface="Malgun Gothic"/>
-              </a:rPr>
-              <a:t> 인산화한다. 즉 지질이 신호 분자가 된다. 3. PIP₃가 PH 도메인을 가진 단백질(AKT, PDK1)을 막으로 끌어온다. 4. 막에서 PDK1과 mTORC2가 AKT를 인산화해 활성화한다. 5. AKT가 여러 표적을 인산화해 </a:t>
-            </a:r>
-            <a:r>
-              <a:rPr sz="1400" b="1" i="0">
-                <a:solidFill>
-                  <a:srgbClr val="11202B"/>
-                </a:solidFill>
-                <a:latin typeface="Malgun Gothic"/>
-                <a:ea typeface="Malgun Gothic"/>
-                <a:cs typeface="Malgun Gothic"/>
-              </a:rPr>
-              <a:t>생존, 성장, 대사</a:t>
-            </a:r>
-            <a:r>
-              <a:rPr sz="1400" b="0" i="0">
-                <a:solidFill>
-                  <a:srgbClr val="11202B"/>
-                </a:solidFill>
-                <a:latin typeface="Malgun Gothic"/>
-                <a:ea typeface="Malgun Gothic"/>
-                <a:cs typeface="Malgun Gothic"/>
-              </a:rPr>
-              <a:t>를 조절한다. 세포사멸 촉진 단백질(BAD)을 억제하고, FOXO 전사인자를 핵에서 내보내고, mTORC1을 켜서 단백질 합성을 올리고, 포도당 수송체의 막 이동을 촉진한다.</a:t>
+              <a:rPr sz="1600" b="0" i="0">
+                <a:solidFill>
+                  <a:srgbClr val="11202B"/>
+                </a:solidFill>
+                <a:latin typeface="Malgun Gothic"/>
+                <a:ea typeface="Malgun Gothic"/>
+                <a:cs typeface="Malgun Gothic"/>
+              </a:rPr>
+              <a:t> 인산화한다. 즉 지질이 신호 분자가 된다.</a:t>
             </a:r>
           </a:p>
         </p:txBody>
@@ -15865,7 +16314,7 @@
               </a:spcAft>
             </a:pPr>
             <a:r>
-              <a:rPr sz="1800" b="1" i="0">
+              <a:rPr sz="1600" b="1" i="0">
                 <a:solidFill>
                   <a:srgbClr val="F2B705"/>
                 </a:solidFill>
@@ -15876,59 +16325,15 @@
               <a:t>•  </a:t>
             </a:r>
             <a:r>
-              <a:rPr sz="1800" b="0" i="0">
-                <a:solidFill>
-                  <a:srgbClr val="11202B"/>
-                </a:solidFill>
-                <a:latin typeface="Malgun Gothic"/>
-                <a:ea typeface="Malgun Gothic"/>
-                <a:cs typeface="Malgun Gothic"/>
-              </a:rPr>
-              <a:t>이 경로를 끄는 장치가 </a:t>
-            </a:r>
-            <a:r>
-              <a:rPr sz="1800" b="1" i="0">
-                <a:solidFill>
-                  <a:srgbClr val="11202B"/>
-                </a:solidFill>
-                <a:latin typeface="Malgun Gothic"/>
-                <a:ea typeface="Malgun Gothic"/>
-                <a:cs typeface="Malgun Gothic"/>
-              </a:rPr>
-              <a:t>PTEN</a:t>
-            </a:r>
-            <a:r>
-              <a:rPr sz="1800" b="0" i="0">
-                <a:solidFill>
-                  <a:srgbClr val="11202B"/>
-                </a:solidFill>
-                <a:latin typeface="Malgun Gothic"/>
-                <a:ea typeface="Malgun Gothic"/>
-                <a:cs typeface="Malgun Gothic"/>
-              </a:rPr>
-              <a:t>이다. PIP₃의 인산기를 떼어 PIP₂로 되돌리는 phosphatase이며, 따라서 </a:t>
-            </a:r>
-            <a:r>
-              <a:rPr sz="1800" b="1" i="0">
-                <a:solidFill>
-                  <a:srgbClr val="11202B"/>
-                </a:solidFill>
-                <a:latin typeface="Malgun Gothic"/>
-                <a:ea typeface="Malgun Gothic"/>
-                <a:cs typeface="Malgun Gothic"/>
-              </a:rPr>
-              <a:t>PTEN의 기능 상실은 경로를 켜 두는 것과 같다.</a:t>
-            </a:r>
-            <a:r>
-              <a:rPr sz="1800" b="0" i="0">
-                <a:solidFill>
-                  <a:srgbClr val="11202B"/>
-                </a:solidFill>
-                <a:latin typeface="Malgun Gothic"/>
-                <a:ea typeface="Malgun Gothic"/>
-                <a:cs typeface="Malgun Gothic"/>
-              </a:rPr>
-              <a:t> PTEN이 사람 종양에서 가장 흔히 변이되는 종양 억제 유전자 가운데 하나인 이유가 여기에 있다.</a:t>
+              <a:rPr sz="1600" b="0" i="0">
+                <a:solidFill>
+                  <a:srgbClr val="11202B"/>
+                </a:solidFill>
+                <a:latin typeface="Malgun Gothic"/>
+                <a:ea typeface="Malgun Gothic"/>
+                <a:cs typeface="Malgun Gothic"/>
+              </a:rPr>
+              <a:t>3. PIP₃가 PH 도메인을 가진 단백질(AKT, PDK1)을 막으로 끌어온다.</a:t>
             </a:r>
           </a:p>
           <a:p>
@@ -15938,7 +16343,7 @@
               </a:spcAft>
             </a:pPr>
             <a:r>
-              <a:rPr sz="1800" b="1" i="0">
+              <a:rPr sz="1600" b="1" i="0">
                 <a:solidFill>
                   <a:srgbClr val="F2B705"/>
                 </a:solidFill>
@@ -15949,7 +16354,160 @@
               <a:t>•  </a:t>
             </a:r>
             <a:r>
-              <a:rPr sz="1800" b="0" i="0">
+              <a:rPr sz="1600" b="0" i="0">
+                <a:solidFill>
+                  <a:srgbClr val="11202B"/>
+                </a:solidFill>
+                <a:latin typeface="Malgun Gothic"/>
+                <a:ea typeface="Malgun Gothic"/>
+                <a:cs typeface="Malgun Gothic"/>
+              </a:rPr>
+              <a:t>4. 막에서 PDK1과 mTORC2가 AKT를 인산화해 활성화한다.</a:t>
+            </a:r>
+          </a:p>
+          <a:p>
+            <a:pPr>
+              <a:spcAft>
+                <a:spcPts val="900"/>
+              </a:spcAft>
+            </a:pPr>
+            <a:r>
+              <a:rPr sz="1600" b="1" i="0">
+                <a:solidFill>
+                  <a:srgbClr val="F2B705"/>
+                </a:solidFill>
+                <a:latin typeface="Malgun Gothic"/>
+                <a:ea typeface="Malgun Gothic"/>
+                <a:cs typeface="Malgun Gothic"/>
+              </a:rPr>
+              <a:t>•  </a:t>
+            </a:r>
+            <a:r>
+              <a:rPr sz="1600" b="0" i="0">
+                <a:solidFill>
+                  <a:srgbClr val="11202B"/>
+                </a:solidFill>
+                <a:latin typeface="Malgun Gothic"/>
+                <a:ea typeface="Malgun Gothic"/>
+                <a:cs typeface="Malgun Gothic"/>
+              </a:rPr>
+              <a:t>5. AKT가 여러 표적을 인산화해 </a:t>
+            </a:r>
+            <a:r>
+              <a:rPr sz="1600" b="1" i="0">
+                <a:solidFill>
+                  <a:srgbClr val="11202B"/>
+                </a:solidFill>
+                <a:latin typeface="Malgun Gothic"/>
+                <a:ea typeface="Malgun Gothic"/>
+                <a:cs typeface="Malgun Gothic"/>
+              </a:rPr>
+              <a:t>생존, 성장, 대사</a:t>
+            </a:r>
+            <a:r>
+              <a:rPr sz="1600" b="0" i="0">
+                <a:solidFill>
+                  <a:srgbClr val="11202B"/>
+                </a:solidFill>
+                <a:latin typeface="Malgun Gothic"/>
+                <a:ea typeface="Malgun Gothic"/>
+                <a:cs typeface="Malgun Gothic"/>
+              </a:rPr>
+              <a:t>를 조절한다. 세포사멸 촉진 단백질(BAD)을 억제하고, FOXO 전사인자를 핵에서 내보내고, mTORC1을 켜서 단백질 합성을 올리고, 포도당 수송체의 막 이동을 촉진한다.</a:t>
+            </a:r>
+          </a:p>
+          <a:p>
+            <a:pPr>
+              <a:spcAft>
+                <a:spcPts val="900"/>
+              </a:spcAft>
+            </a:pPr>
+            <a:r>
+              <a:rPr sz="1600" b="1" i="0">
+                <a:solidFill>
+                  <a:srgbClr val="F2B705"/>
+                </a:solidFill>
+                <a:latin typeface="Malgun Gothic"/>
+                <a:ea typeface="Malgun Gothic"/>
+                <a:cs typeface="Malgun Gothic"/>
+              </a:rPr>
+              <a:t>•  </a:t>
+            </a:r>
+            <a:r>
+              <a:rPr sz="1600" b="0" i="0">
+                <a:solidFill>
+                  <a:srgbClr val="11202B"/>
+                </a:solidFill>
+                <a:latin typeface="Malgun Gothic"/>
+                <a:ea typeface="Malgun Gothic"/>
+                <a:cs typeface="Malgun Gothic"/>
+              </a:rPr>
+              <a:t>이 경로를 끄는 장치가 </a:t>
+            </a:r>
+            <a:r>
+              <a:rPr sz="1600" b="1" i="0">
+                <a:solidFill>
+                  <a:srgbClr val="11202B"/>
+                </a:solidFill>
+                <a:latin typeface="Malgun Gothic"/>
+                <a:ea typeface="Malgun Gothic"/>
+                <a:cs typeface="Malgun Gothic"/>
+              </a:rPr>
+              <a:t>PTEN</a:t>
+            </a:r>
+            <a:r>
+              <a:rPr sz="1600" b="0" i="0">
+                <a:solidFill>
+                  <a:srgbClr val="11202B"/>
+                </a:solidFill>
+                <a:latin typeface="Malgun Gothic"/>
+                <a:ea typeface="Malgun Gothic"/>
+                <a:cs typeface="Malgun Gothic"/>
+              </a:rPr>
+              <a:t>이다. PIP₃의 인산기를 떼어 PIP₂로 되돌리는 phosphatase이며, 따라서 </a:t>
+            </a:r>
+            <a:r>
+              <a:rPr sz="1600" b="1" i="0">
+                <a:solidFill>
+                  <a:srgbClr val="11202B"/>
+                </a:solidFill>
+                <a:latin typeface="Malgun Gothic"/>
+                <a:ea typeface="Malgun Gothic"/>
+                <a:cs typeface="Malgun Gothic"/>
+              </a:rPr>
+              <a:t>PTEN의 기능 상실은 경로를 켜 두는 것과 같다.</a:t>
+            </a:r>
+            <a:r>
+              <a:rPr sz="1600" b="0" i="0">
+                <a:solidFill>
+                  <a:srgbClr val="11202B"/>
+                </a:solidFill>
+                <a:latin typeface="Malgun Gothic"/>
+                <a:ea typeface="Malgun Gothic"/>
+                <a:cs typeface="Malgun Gothic"/>
+              </a:rPr>
+              <a:t> PTEN이 사람 종양에서 가장 흔히 변이되는 종양 억제 유전자 가운데 하나인 이유가 여기에 있다.</a:t>
+            </a:r>
+          </a:p>
+          <a:p>
+            <a:pPr>
+              <a:spcAft>
+                <a:spcPts val="900"/>
+              </a:spcAft>
+            </a:pPr>
+            <a:r>
+              <a:rPr sz="1600" b="1" i="0">
+                <a:solidFill>
+                  <a:srgbClr val="F2B705"/>
+                </a:solidFill>
+                <a:latin typeface="Malgun Gothic"/>
+                <a:ea typeface="Malgun Gothic"/>
+                <a:cs typeface="Malgun Gothic"/>
+              </a:rPr>
+              <a:t>•  </a:t>
+            </a:r>
+            <a:r>
+              <a:rPr sz="1600" b="0" i="0">
                 <a:solidFill>
                   <a:srgbClr val="11202B"/>
                 </a:solidFill>
@@ -15960,7 +16518,7 @@
               <a:t>두 경로의 결과를 대비하면 기억이 쉽다. </a:t>
             </a:r>
             <a:r>
-              <a:rPr sz="1800" b="1" i="0">
+              <a:rPr sz="1600" b="1" i="0">
                 <a:solidFill>
                   <a:srgbClr val="11202B"/>
                 </a:solidFill>
@@ -15971,7 +16529,7 @@
               <a:t>Ras-MAPK는 주로 "분열하라", PI3K-AKT는 주로 "살아 있고 자라라"는 신호다.</a:t>
             </a:r>
             <a:r>
-              <a:rPr sz="1800" b="0" i="0">
+              <a:rPr sz="1600" b="0" i="0">
                 <a:solidFill>
                   <a:srgbClr val="11202B"/>
                 </a:solidFill>
@@ -24363,7 +24921,7 @@
               </a:spcAft>
             </a:pPr>
             <a:r>
-              <a:rPr sz="1600" b="1" i="0">
+              <a:rPr sz="1800" b="1" i="0">
                 <a:solidFill>
                   <a:srgbClr val="F2B705"/>
                 </a:solidFill>
@@ -24374,7 +24932,7 @@
               <a:t>•  </a:t>
             </a:r>
             <a:r>
-              <a:rPr sz="1600" b="0" i="0">
+              <a:rPr sz="1800" b="0" i="0">
                 <a:solidFill>
                   <a:srgbClr val="11202B"/>
                 </a:solidFill>
@@ -24385,7 +24943,7 @@
               <a:t>다세포 생물의 세포는 혼자 결정하지 않는다. 언제 분열하고 언제 죽고 무엇으로 분화할지를 주변과 전신의 신호에 맞추어 정한다. 신호 전달은 </a:t>
             </a:r>
             <a:r>
-              <a:rPr sz="1600" b="1" i="0">
+              <a:rPr sz="1800" b="1" i="0">
                 <a:solidFill>
                   <a:srgbClr val="11202B"/>
                 </a:solidFill>
@@ -24396,7 +24954,7 @@
               <a:t>세포 밖의 사건을 세포 안의 반응으로 바꾸는 장치</a:t>
             </a:r>
             <a:r>
-              <a:rPr sz="1600" b="0" i="0">
+              <a:rPr sz="1800" b="0" i="0">
                 <a:solidFill>
                   <a:srgbClr val="11202B"/>
                 </a:solidFill>
@@ -24414,7 +24972,7 @@
               </a:spcAft>
             </a:pPr>
             <a:r>
-              <a:rPr sz="1600" b="1" i="0">
+              <a:rPr sz="1800" b="1" i="0">
                 <a:solidFill>
                   <a:srgbClr val="F2B705"/>
                 </a:solidFill>
@@ -24425,7 +24983,7 @@
               <a:t>•  </a:t>
             </a:r>
             <a:r>
-              <a:rPr sz="1600" b="0" i="0">
+              <a:rPr sz="1800" b="0" i="0">
                 <a:solidFill>
                   <a:srgbClr val="11202B"/>
                 </a:solidFill>
@@ -24436,7 +24994,7 @@
               <a:t>1. </a:t>
             </a:r>
             <a:r>
-              <a:rPr sz="1600" b="1" i="0">
+              <a:rPr sz="1800" b="1" i="0">
                 <a:solidFill>
                   <a:srgbClr val="11202B"/>
                 </a:solidFill>
@@ -24447,81 +25005,15 @@
               <a:t>수신</a:t>
             </a:r>
             <a:r>
-              <a:rPr sz="1600" b="0" i="0">
-                <a:solidFill>
-                  <a:srgbClr val="11202B"/>
-                </a:solidFill>
-                <a:latin typeface="Malgun Gothic"/>
-                <a:ea typeface="Malgun Gothic"/>
-                <a:cs typeface="Malgun Gothic"/>
-              </a:rPr>
-              <a:t>: 신호 분자가 수용체에 결합한다. 2. </a:t>
-            </a:r>
-            <a:r>
-              <a:rPr sz="1600" b="1" i="0">
-                <a:solidFill>
-                  <a:srgbClr val="11202B"/>
-                </a:solidFill>
-                <a:latin typeface="Malgun Gothic"/>
-                <a:ea typeface="Malgun Gothic"/>
-                <a:cs typeface="Malgun Gothic"/>
-              </a:rPr>
-              <a:t>변환</a:t>
-            </a:r>
-            <a:r>
-              <a:rPr sz="1600" b="0" i="0">
-                <a:solidFill>
-                  <a:srgbClr val="11202B"/>
-                </a:solidFill>
-                <a:latin typeface="Malgun Gothic"/>
-                <a:ea typeface="Malgun Gothic"/>
-                <a:cs typeface="Malgun Gothic"/>
-              </a:rPr>
-              <a:t>: 결합이 수용체의 구조나 활성을 바꾼다. 3. </a:t>
-            </a:r>
-            <a:r>
-              <a:rPr sz="1600" b="1" i="0">
-                <a:solidFill>
-                  <a:srgbClr val="11202B"/>
-                </a:solidFill>
-                <a:latin typeface="Malgun Gothic"/>
-                <a:ea typeface="Malgun Gothic"/>
-                <a:cs typeface="Malgun Gothic"/>
-              </a:rPr>
-              <a:t>전달과 증폭</a:t>
-            </a:r>
-            <a:r>
-              <a:rPr sz="1600" b="0" i="0">
-                <a:solidFill>
-                  <a:srgbClr val="11202B"/>
-                </a:solidFill>
-                <a:latin typeface="Malgun Gothic"/>
-                <a:ea typeface="Malgun Gothic"/>
-                <a:cs typeface="Malgun Gothic"/>
-              </a:rPr>
-              <a:t>: 세포 안의 분자들이 차례로 변화를 전달하며 신호를 키운다. 4. </a:t>
-            </a:r>
-            <a:r>
-              <a:rPr sz="1600" b="1" i="0">
-                <a:solidFill>
-                  <a:srgbClr val="11202B"/>
-                </a:solidFill>
-                <a:latin typeface="Malgun Gothic"/>
-                <a:ea typeface="Malgun Gothic"/>
-                <a:cs typeface="Malgun Gothic"/>
-              </a:rPr>
-              <a:t>반응</a:t>
-            </a:r>
-            <a:r>
-              <a:rPr sz="1600" b="0" i="0">
-                <a:solidFill>
-                  <a:srgbClr val="11202B"/>
-                </a:solidFill>
-                <a:latin typeface="Malgun Gothic"/>
-                <a:ea typeface="Malgun Gothic"/>
-                <a:cs typeface="Malgun Gothic"/>
-              </a:rPr>
-              <a:t>: 효소 활성, 세포골격, 유전자 발현이 바뀐다.</a:t>
+              <a:rPr sz="1800" b="0" i="0">
+                <a:solidFill>
+                  <a:srgbClr val="11202B"/>
+                </a:solidFill>
+                <a:latin typeface="Malgun Gothic"/>
+                <a:ea typeface="Malgun Gothic"/>
+                <a:cs typeface="Malgun Gothic"/>
+              </a:rPr>
+              <a:t>: 신호 분자가 수용체에 결합한다.</a:t>
             </a:r>
           </a:p>
           <a:p>
@@ -24531,7 +25023,7 @@
               </a:spcAft>
             </a:pPr>
             <a:r>
-              <a:rPr sz="1600" b="1" i="0">
+              <a:rPr sz="1800" b="1" i="0">
                 <a:solidFill>
                   <a:srgbClr val="F2B705"/>
                 </a:solidFill>
@@ -24542,37 +25034,37 @@
               <a:t>•  </a:t>
             </a:r>
             <a:r>
-              <a:rPr sz="1600" b="0" i="0">
-                <a:solidFill>
-                  <a:srgbClr val="11202B"/>
-                </a:solidFill>
-                <a:latin typeface="Malgun Gothic"/>
-                <a:ea typeface="Malgun Gothic"/>
-                <a:cs typeface="Malgun Gothic"/>
-              </a:rPr>
-              <a:t>이 장치가 풀어야 하는 요구는 서로 충돌한다. </a:t>
-            </a:r>
-            <a:r>
-              <a:rPr sz="1600" b="1" i="0">
-                <a:solidFill>
-                  <a:srgbClr val="11202B"/>
-                </a:solidFill>
-                <a:latin typeface="Malgun Gothic"/>
-                <a:ea typeface="Malgun Gothic"/>
-                <a:cs typeface="Malgun Gothic"/>
-              </a:rPr>
-              <a:t>민감해야 하지만 잡음에 반응해서는 안 되고, 빨라야 하지만 끌 수 있어야 하며, 특이해야 하지만 하나의 신호로 여러 반응을 내야 한다.</a:t>
-            </a:r>
-            <a:r>
-              <a:rPr sz="1600" b="0" i="0">
-                <a:solidFill>
-                  <a:srgbClr val="11202B"/>
-                </a:solidFill>
-                <a:latin typeface="Malgun Gothic"/>
-                <a:ea typeface="Malgun Gothic"/>
-                <a:cs typeface="Malgun Gothic"/>
-              </a:rPr>
-              <a:t> 이 수업에서 다루는 구조의 대부분은 이 충돌을 해결하는 방식으로 읽을 수 있다.</a:t>
+              <a:rPr sz="1800" b="0" i="0">
+                <a:solidFill>
+                  <a:srgbClr val="11202B"/>
+                </a:solidFill>
+                <a:latin typeface="Malgun Gothic"/>
+                <a:ea typeface="Malgun Gothic"/>
+                <a:cs typeface="Malgun Gothic"/>
+              </a:rPr>
+              <a:t>2. </a:t>
+            </a:r>
+            <a:r>
+              <a:rPr sz="1800" b="1" i="0">
+                <a:solidFill>
+                  <a:srgbClr val="11202B"/>
+                </a:solidFill>
+                <a:latin typeface="Malgun Gothic"/>
+                <a:ea typeface="Malgun Gothic"/>
+                <a:cs typeface="Malgun Gothic"/>
+              </a:rPr>
+              <a:t>변환</a:t>
+            </a:r>
+            <a:r>
+              <a:rPr sz="1800" b="0" i="0">
+                <a:solidFill>
+                  <a:srgbClr val="11202B"/>
+                </a:solidFill>
+                <a:latin typeface="Malgun Gothic"/>
+                <a:ea typeface="Malgun Gothic"/>
+                <a:cs typeface="Malgun Gothic"/>
+              </a:rPr>
+              <a:t>: 결합이 수용체의 구조나 활성을 바꾼다.</a:t>
             </a:r>
           </a:p>
           <a:p>
@@ -24582,7 +25074,7 @@
               </a:spcAft>
             </a:pPr>
             <a:r>
-              <a:rPr sz="1600" b="1" i="0">
+              <a:rPr sz="1800" b="1" i="0">
                 <a:solidFill>
                   <a:srgbClr val="F2B705"/>
                 </a:solidFill>
@@ -24593,7 +25085,160 @@
               <a:t>•  </a:t>
             </a:r>
             <a:r>
-              <a:rPr sz="1600" b="0" i="0">
+              <a:rPr sz="1800" b="0" i="0">
+                <a:solidFill>
+                  <a:srgbClr val="11202B"/>
+                </a:solidFill>
+                <a:latin typeface="Malgun Gothic"/>
+                <a:ea typeface="Malgun Gothic"/>
+                <a:cs typeface="Malgun Gothic"/>
+              </a:rPr>
+              <a:t>3. </a:t>
+            </a:r>
+            <a:r>
+              <a:rPr sz="1800" b="1" i="0">
+                <a:solidFill>
+                  <a:srgbClr val="11202B"/>
+                </a:solidFill>
+                <a:latin typeface="Malgun Gothic"/>
+                <a:ea typeface="Malgun Gothic"/>
+                <a:cs typeface="Malgun Gothic"/>
+              </a:rPr>
+              <a:t>전달과 증폭</a:t>
+            </a:r>
+            <a:r>
+              <a:rPr sz="1800" b="0" i="0">
+                <a:solidFill>
+                  <a:srgbClr val="11202B"/>
+                </a:solidFill>
+                <a:latin typeface="Malgun Gothic"/>
+                <a:ea typeface="Malgun Gothic"/>
+                <a:cs typeface="Malgun Gothic"/>
+              </a:rPr>
+              <a:t>: 세포 안의 분자들이 차례로 변화를 전달하며 신호를 키운다.</a:t>
+            </a:r>
+          </a:p>
+          <a:p>
+            <a:pPr>
+              <a:spcAft>
+                <a:spcPts val="900"/>
+              </a:spcAft>
+            </a:pPr>
+            <a:r>
+              <a:rPr sz="1800" b="1" i="0">
+                <a:solidFill>
+                  <a:srgbClr val="F2B705"/>
+                </a:solidFill>
+                <a:latin typeface="Malgun Gothic"/>
+                <a:ea typeface="Malgun Gothic"/>
+                <a:cs typeface="Malgun Gothic"/>
+              </a:rPr>
+              <a:t>•  </a:t>
+            </a:r>
+            <a:r>
+              <a:rPr sz="1800" b="0" i="0">
+                <a:solidFill>
+                  <a:srgbClr val="11202B"/>
+                </a:solidFill>
+                <a:latin typeface="Malgun Gothic"/>
+                <a:ea typeface="Malgun Gothic"/>
+                <a:cs typeface="Malgun Gothic"/>
+              </a:rPr>
+              <a:t>4. </a:t>
+            </a:r>
+            <a:r>
+              <a:rPr sz="1800" b="1" i="0">
+                <a:solidFill>
+                  <a:srgbClr val="11202B"/>
+                </a:solidFill>
+                <a:latin typeface="Malgun Gothic"/>
+                <a:ea typeface="Malgun Gothic"/>
+                <a:cs typeface="Malgun Gothic"/>
+              </a:rPr>
+              <a:t>반응</a:t>
+            </a:r>
+            <a:r>
+              <a:rPr sz="1800" b="0" i="0">
+                <a:solidFill>
+                  <a:srgbClr val="11202B"/>
+                </a:solidFill>
+                <a:latin typeface="Malgun Gothic"/>
+                <a:ea typeface="Malgun Gothic"/>
+                <a:cs typeface="Malgun Gothic"/>
+              </a:rPr>
+              <a:t>: 효소 활성, 세포골격, 유전자 발현이 바뀐다.</a:t>
+            </a:r>
+          </a:p>
+          <a:p>
+            <a:pPr>
+              <a:spcAft>
+                <a:spcPts val="900"/>
+              </a:spcAft>
+            </a:pPr>
+            <a:r>
+              <a:rPr sz="1800" b="1" i="0">
+                <a:solidFill>
+                  <a:srgbClr val="F2B705"/>
+                </a:solidFill>
+                <a:latin typeface="Malgun Gothic"/>
+                <a:ea typeface="Malgun Gothic"/>
+                <a:cs typeface="Malgun Gothic"/>
+              </a:rPr>
+              <a:t>•  </a:t>
+            </a:r>
+            <a:r>
+              <a:rPr sz="1800" b="0" i="0">
+                <a:solidFill>
+                  <a:srgbClr val="11202B"/>
+                </a:solidFill>
+                <a:latin typeface="Malgun Gothic"/>
+                <a:ea typeface="Malgun Gothic"/>
+                <a:cs typeface="Malgun Gothic"/>
+              </a:rPr>
+              <a:t>이 장치가 풀어야 하는 요구는 서로 충돌한다. </a:t>
+            </a:r>
+            <a:r>
+              <a:rPr sz="1800" b="1" i="0">
+                <a:solidFill>
+                  <a:srgbClr val="11202B"/>
+                </a:solidFill>
+                <a:latin typeface="Malgun Gothic"/>
+                <a:ea typeface="Malgun Gothic"/>
+                <a:cs typeface="Malgun Gothic"/>
+              </a:rPr>
+              <a:t>민감해야 하지만 잡음에 반응해서는 안 되고, 빨라야 하지만 끌 수 있어야 하며, 특이해야 하지만 하나의 신호로 여러 반응을 내야 한다.</a:t>
+            </a:r>
+            <a:r>
+              <a:rPr sz="1800" b="0" i="0">
+                <a:solidFill>
+                  <a:srgbClr val="11202B"/>
+                </a:solidFill>
+                <a:latin typeface="Malgun Gothic"/>
+                <a:ea typeface="Malgun Gothic"/>
+                <a:cs typeface="Malgun Gothic"/>
+              </a:rPr>
+              <a:t> 이 수업에서 다루는 구조의 대부분은 이 충돌을 해결하는 방식으로 읽을 수 있다.</a:t>
+            </a:r>
+          </a:p>
+          <a:p>
+            <a:pPr>
+              <a:spcAft>
+                <a:spcPts val="900"/>
+              </a:spcAft>
+            </a:pPr>
+            <a:r>
+              <a:rPr sz="1800" b="1" i="0">
+                <a:solidFill>
+                  <a:srgbClr val="F2B705"/>
+                </a:solidFill>
+                <a:latin typeface="Malgun Gothic"/>
+                <a:ea typeface="Malgun Gothic"/>
+                <a:cs typeface="Malgun Gothic"/>
+              </a:rPr>
+              <a:t>•  </a:t>
+            </a:r>
+            <a:r>
+              <a:rPr sz="1800" b="0" i="0">
                 <a:solidFill>
                   <a:srgbClr val="11202B"/>
                 </a:solidFill>
